--- a/slides/Math130Unit3D.pptx
+++ b/slides/Math130Unit3D.pptx
@@ -10,12 +10,13 @@
     <p:sldId id="258" r:id="rId4"/>
     <p:sldId id="259" r:id="rId5"/>
     <p:sldId id="260" r:id="rId6"/>
-    <p:sldId id="261" r:id="rId7"/>
     <p:sldId id="262" r:id="rId8"/>
+    <p:sldId id="266" r:id="rId12"/>
     <p:sldId id="263" r:id="rId9"/>
     <p:sldId id="264" r:id="rId10"/>
     <p:sldId id="265" r:id="rId11"/>
-    <p:sldId id="266" r:id="rId12"/>
+    <p:sldId id="261" r:id="rId7"/>
+    <p:sldId id="269" r:id="rId20"/>
     <p:sldId id="267" r:id="rId13"/>
     <p:sldId id="268" r:id="rId14"/>
   </p:sldIdLst>
@@ -2571,30 +2572,6 @@
           </a:p>
         </p:txBody>
       </p:sp>
-      <p:pic>
-        <p:nvPicPr>
-          <p:cNvPr id="3" name="Image 0" descr="preencoded.png">    </p:cNvPr>
-          <p:cNvPicPr>
-            <a:picLocks noChangeAspect="1"/>
-          </p:cNvPicPr>
-          <p:nvPr/>
-        </p:nvPicPr>
-        <p:blipFill>
-          <a:blip r:embed="rId1"/>
-          <a:stretch>
-            <a:fillRect/>
-          </a:stretch>
-        </p:blipFill>
-        <p:spPr>
-          <a:xfrm>
-            <a:off x="457200" y="731520"/>
-            <a:ext cx="4572000" cy="3108960"/>
-          </a:xfrm>
-          <a:prstGeom prst="rect">
-            <a:avLst/>
-          </a:prstGeom>
-        </p:spPr>
-      </p:pic>
       <p:sp>
         <p:nvSpPr>
           <p:cNvPr id="4" name="Shape 1"/>
@@ -2819,6 +2796,30 @@
           </a:p>
         </p:txBody>
       </p:sp>
+      <p:pic>
+        <p:nvPicPr>
+          <p:cNvPr id="7" name="Picture 6" descr="s_scalar_multiplication.png"/>
+          <p:cNvPicPr>
+            <a:picLocks noChangeAspect="1"/>
+          </p:cNvPicPr>
+          <p:nvPr/>
+        </p:nvPicPr>
+        <p:blipFill>
+          <a:blip r:embed="rId4"/>
+          <a:stretch>
+            <a:fillRect/>
+          </a:stretch>
+        </p:blipFill>
+        <p:spPr>
+          <a:xfrm>
+            <a:off x="457200" y="731520"/>
+            <a:ext cx="4572000" cy="3108960"/>
+          </a:xfrm>
+          <a:prstGeom prst="rect">
+            <a:avLst/>
+          </a:prstGeom>
+        </p:spPr>
+      </p:pic>
     </p:spTree>
   </p:cSld>
   <p:clrMapOvr>
@@ -4019,7 +4020,7 @@
         </p:nvSpPr>
         <p:spPr>
           <a:xfrm>
-            <a:off x="731520" y="4572000"/>
+            <a:off x="731520" y="4760000"/>
             <a:ext cx="7315200" cy="365760"/>
           </a:xfrm>
           <a:prstGeom prst="rect">
@@ -4036,9 +4037,9 @@
               <a:buNone/>
             </a:pPr>
             <a:r>
-              <a:rPr lang="en-US" sz="1300" i="1" dirty="0">
-                <a:solidFill>
-                  <a:srgbClr val="64748B"/>
+              <a:rPr lang="en-US" sz="1300" i="0" dirty="0" b="1">
+                <a:solidFill>
+                  <a:srgbClr val="0891B2"/>
                 </a:solidFill>
                 <a:latin typeface="Calibri" pitchFamily="34" charset="0"/>
                 <a:ea typeface="Calibri" pitchFamily="34" charset="-122"/>
@@ -4050,6 +4051,256 @@
           </a:p>
         </p:txBody>
       </p:sp>
+    </p:spTree>
+  </p:cSld>
+  <p:clrMapOvr>
+    <a:masterClrMapping/>
+  </p:clrMapOvr>
+</p:sld>
+</file>
+
+<file path=ppt/slides/slide14.xml><?xml version="1.0" encoding="utf-8"?>
+<p:sld xmlns:a="http://schemas.openxmlformats.org/drawingml/2006/main" xmlns:p="http://schemas.openxmlformats.org/presentationml/2006/main" xmlns:r="http://schemas.openxmlformats.org/officeDocument/2006/relationships">
+  <p:cSld>
+    <p:spTree>
+      <p:nvGrpSpPr>
+        <p:cNvPr id="1" name=""/>
+        <p:cNvGrpSpPr/>
+        <p:nvPr/>
+      </p:nvGrpSpPr>
+      <p:grpSpPr/>
+      <p:sp>
+        <p:nvSpPr>
+          <p:cNvPr id="2" name="Text 0"/>
+          <p:cNvSpPr/>
+          <p:nvPr/>
+        </p:nvSpPr>
+        <p:spPr>
+          <a:xfrm>
+            <a:off x="548640" y="274320"/>
+            <a:ext cx="8229600" cy="548640"/>
+          </a:xfrm>
+          <a:prstGeom prst="rect">
+            <a:avLst/>
+          </a:prstGeom>
+          <a:noFill/>
+          <a:ln/>
+        </p:spPr>
+        <p:txBody>
+          <a:bodyPr wrap="square" lIns="0" tIns="0" rIns="0" bIns="0" rtlCol="0" anchor="ctr"/>
+          <a:lstStyle/>
+          <a:p>
+            <a:pPr indent="0" marL="0">
+              <a:buNone/>
+            </a:pPr>
+            <a:r>
+              <a:rPr sz="3200" b="1">
+                <a:solidFill>
+                  <a:srgbClr val="1E3A5F"/>
+                </a:solidFill>
+                <a:latin typeface="Georgia"/>
+              </a:rPr>
+              <a:t>You Try</a:t>
+            </a:r>
+            <a:endParaRPr lang="en-US" sz="2800" dirty="0"/>
+          </a:p>
+        </p:txBody>
+      </p:sp>
+      <p:sp>
+        <p:nvSpPr>
+          <p:cNvPr id="3" name="Shape 1"/>
+          <p:cNvSpPr/>
+          <p:nvPr/>
+        </p:nvSpPr>
+        <p:spPr>
+          <a:xfrm>
+            <a:off x="457200" y="914400"/>
+            <a:ext cx="4572000" cy="914400"/>
+          </a:xfrm>
+          <a:prstGeom prst="rect">
+            <a:avLst/>
+          </a:prstGeom>
+          <a:solidFill>
+            <a:srgbClr val="FFFFFF"/>
+          </a:solidFill>
+          <a:ln>
+            <a:solidFill>
+              <a:srgbClr val="0891B2"/>
+            </a:solidFill>
+          </a:ln>
+          <a:effectLst>
+            <a:outerShdw sx="100000" sy="100000" kx="0" ky="0" algn="bl" rotWithShape="0" blurRad="76200" dist="25400" dir="8100000">
+              <a:srgbClr val="000000">
+                <a:alpha val="10000"/>
+              </a:srgbClr>
+            </a:outerShdw>
+          </a:effectLst>
+        </p:spPr>
+      </p:sp>
+      <p:sp>
+        <p:nvSpPr>
+          <p:cNvPr id="4" name="Text 2"/>
+          <p:cNvSpPr/>
+          <p:nvPr/>
+        </p:nvSpPr>
+        <p:spPr>
+          <a:xfrm>
+            <a:off x="640080" y="960120"/>
+            <a:ext cx="4023360" cy="822960"/>
+          </a:xfrm>
+          <a:prstGeom prst="rect">
+            <a:avLst/>
+          </a:prstGeom>
+          <a:noFill/>
+          <a:ln/>
+        </p:spPr>
+        <p:txBody>
+          <a:bodyPr wrap="square" rtlCol="0" anchor="ctr"/>
+          <a:lstStyle/>
+          <a:p>
+            <a:pPr indent="0" marL="0">
+              <a:buNone/>
+            </a:pPr>
+            <a:pPr indent="0" marL="0">
+              <a:buNone/>
+            </a:pPr>
+            <a:r>
+              <a:rPr sz="1500">
+                <a:solidFill>
+                  <a:srgbClr val="1E3A5F"/>
+                </a:solidFill>
+                <a:latin typeface="Calibri"/>
+              </a:rPr>
+              <a:t>Vector v goes from P(−4, −2) to Q(2, 1).  Find:</a:t>
+            </a:r>
+            <a:endParaRPr lang="en-US" sz="1400" dirty="0"/>
+          </a:p>
+          <a:p>
+            <a:r>
+              <a:rPr sz="1500">
+                <a:solidFill>
+                  <a:srgbClr val="1E3A5F"/>
+                </a:solidFill>
+                <a:latin typeface="Calibri"/>
+              </a:rPr>
+              <a:t>(a) component form   (b) magnitude   (c) direction angle</a:t>
+            </a:r>
+          </a:p>
+        </p:txBody>
+      </p:sp>
+      <p:sp>
+        <p:nvSpPr>
+          <p:cNvPr id="6" name="Shape 3"/>
+          <p:cNvSpPr/>
+          <p:nvPr/>
+        </p:nvSpPr>
+        <p:spPr>
+          <a:xfrm>
+            <a:off x="457200" y="1920240"/>
+            <a:ext cx="4389120" cy="2560320"/>
+          </a:xfrm>
+          <a:prstGeom prst="rect">
+            <a:avLst/>
+          </a:prstGeom>
+          <a:solidFill>
+            <a:srgbClr val="FFFFFF"/>
+          </a:solidFill>
+          <a:ln/>
+          <a:effectLst>
+            <a:outerShdw sx="100000" sy="100000" kx="0" ky="0" algn="bl" rotWithShape="0" blurRad="76200" dist="25400" dir="8100000">
+              <a:srgbClr val="000000">
+                <a:alpha val="10000"/>
+              </a:srgbClr>
+            </a:outerShdw>
+          </a:effectLst>
+        </p:spPr>
+      </p:sp>
+      <p:sp>
+        <p:nvSpPr>
+          <p:cNvPr id="7" name="Text 4"/>
+          <p:cNvSpPr/>
+          <p:nvPr/>
+        </p:nvSpPr>
+        <p:spPr>
+          <a:xfrm>
+            <a:off x="640080" y="2057400"/>
+            <a:ext cx="4023360" cy="2286000"/>
+          </a:xfrm>
+          <a:prstGeom prst="rect">
+            <a:avLst/>
+          </a:prstGeom>
+          <a:noFill/>
+          <a:ln/>
+        </p:spPr>
+        <p:txBody>
+          <a:bodyPr wrap="square" rtlCol="0" anchor="ctr"/>
+          <a:lstStyle/>
+          <a:p>
+            <a:pPr indent="0" marL="0">
+              <a:spcAft>
+                <a:spcPts val="300"/>
+              </a:spcAft>
+              <a:buNone/>
+            </a:pPr>
+            <a:r>
+              <a:rPr sz="1600">
+                <a:solidFill>
+                  <a:srgbClr val="1E3A5F"/>
+                </a:solidFill>
+                <a:latin typeface="Calibri"/>
+              </a:rPr>
+              <a:t>(a)  v = ⟨2 − (−4), 1 − (−2)⟩ = ⟨6, 3⟩</a:t>
+            </a:r>
+            <a:endParaRPr lang="en-US" sz="1500" dirty="0"/>
+          </a:p>
+          <a:p>
+            <a:r>
+              <a:rPr sz="1600">
+                <a:solidFill>
+                  <a:srgbClr val="1E3A5F"/>
+                </a:solidFill>
+                <a:latin typeface="Calibri"/>
+              </a:rPr>
+              <a:t>(b)  |v| = √(36 + 9) = √45 = 3√5 ≈ 6.71</a:t>
+            </a:r>
+          </a:p>
+          <a:p>
+            <a:r>
+              <a:rPr sz="1600">
+                <a:solidFill>
+                  <a:srgbClr val="1E3A5F"/>
+                </a:solidFill>
+                <a:latin typeface="Calibri"/>
+              </a:rPr>
+              <a:t>(c)  θ = tan⁻¹(3 / 6) ≈ 26.57°   (Q I, no adjustment)</a:t>
+            </a:r>
+          </a:p>
+        </p:txBody>
+      </p:sp>
+      <p:pic>
+        <p:nvPicPr>
+          <p:cNvPr id="8" name="Picture 7" descr="s_you_try.png"/>
+          <p:cNvPicPr>
+            <a:picLocks noChangeAspect="1"/>
+          </p:cNvPicPr>
+          <p:nvPr/>
+        </p:nvPicPr>
+        <p:blipFill>
+          <a:blip r:embed="rId2"/>
+          <a:stretch>
+            <a:fillRect/>
+          </a:stretch>
+        </p:blipFill>
+        <p:spPr>
+          <a:xfrm>
+            <a:off x="5029200" y="731520"/>
+            <a:ext cx="3931920" cy="3383280"/>
+          </a:xfrm>
+          <a:prstGeom prst="rect">
+            <a:avLst/>
+          </a:prstGeom>
+        </p:spPr>
+      </p:pic>
     </p:spTree>
   </p:cSld>
   <p:clrMapOvr>
@@ -4127,15 +4378,13 @@
               <a:buNone/>
             </a:pPr>
             <a:r>
-              <a:rPr lang="en-US" sz="4400" b="1" dirty="0">
+              <a:rPr sz="4400" b="1">
                 <a:solidFill>
                   <a:srgbClr val="FFFFFF"/>
                 </a:solidFill>
-                <a:latin typeface="Georgia" pitchFamily="34" charset="0"/>
-                <a:ea typeface="Georgia" pitchFamily="34" charset="-122"/>
-                <a:cs typeface="Georgia" pitchFamily="34" charset="-120"/>
-              </a:rPr>
-              <a:t>Section 8.4</a:t>
+                <a:latin typeface="Georgia"/>
+              </a:rPr>
+              <a:t>Why Vectors?</a:t>
             </a:r>
             <a:endParaRPr lang="en-US" sz="4400" dirty="0"/>
           </a:p>
@@ -4166,15 +4415,13 @@
               <a:buNone/>
             </a:pPr>
             <a:r>
-              <a:rPr lang="en-US" sz="2200" dirty="0">
-                <a:solidFill>
-                  <a:srgbClr val="7C3AED"/>
-                </a:solidFill>
-                <a:latin typeface="Calibri" pitchFamily="34" charset="0"/>
-                <a:ea typeface="Calibri" pitchFamily="34" charset="-122"/>
-                <a:cs typeface="Calibri" pitchFamily="34" charset="-120"/>
-              </a:rPr>
-              <a:t>Vectors</a:t>
+              <a:rPr sz="2200">
+                <a:solidFill>
+                  <a:srgbClr val="0891B2"/>
+                </a:solidFill>
+                <a:latin typeface="Calibri"/>
+              </a:rPr>
+              <a:t>Many real-world quantities need both size AND direction.</a:t>
             </a:r>
             <a:endParaRPr lang="en-US" sz="2200" dirty="0"/>
           </a:p>
@@ -4189,7 +4436,7 @@
         <p:spPr>
           <a:xfrm>
             <a:off x="731520" y="3200400"/>
-            <a:ext cx="4572000" cy="457200"/>
+            <a:ext cx="7772400" cy="1828800"/>
           </a:xfrm>
           <a:prstGeom prst="rect">
             <a:avLst/>
@@ -4205,17 +4452,59 @@
               <a:buNone/>
             </a:pPr>
             <a:r>
-              <a:rPr lang="en-US" sz="1400" b="1" dirty="0">
-                <a:solidFill>
-                  <a:srgbClr val="0891B2"/>
-                </a:solidFill>
-                <a:latin typeface="Calibri" pitchFamily="34" charset="0"/>
-                <a:ea typeface="Calibri" pitchFamily="34" charset="-122"/>
-                <a:cs typeface="Calibri" pitchFamily="34" charset="-120"/>
-              </a:rPr>
-              <a:t>5 ALEKS Skills (4 from Section 8.4 + 1 Supplementary)</a:t>
+              <a:rPr sz="1800">
+                <a:solidFill>
+                  <a:srgbClr val="FFFFFF"/>
+                </a:solidFill>
+                <a:latin typeface="Calibri"/>
+              </a:rPr>
+              <a:t>•  Velocity — wind at 15 mph to the north-east</a:t>
             </a:r>
             <a:endParaRPr lang="en-US" sz="1400" dirty="0"/>
+          </a:p>
+          <a:p>
+            <a:r>
+              <a:rPr sz="1800">
+                <a:solidFill>
+                  <a:srgbClr val="FFFFFF"/>
+                </a:solidFill>
+                <a:latin typeface="Calibri"/>
+              </a:rPr>
+              <a:t>•  Force — 50 N pulling down at 30°</a:t>
+            </a:r>
+          </a:p>
+          <a:p>
+            <a:r>
+              <a:rPr sz="1800">
+                <a:solidFill>
+                  <a:srgbClr val="FFFFFF"/>
+                </a:solidFill>
+                <a:latin typeface="Calibri"/>
+              </a:rPr>
+              <a:t>•  Displacement — walking 3 blocks east, then 2 north</a:t>
+            </a:r>
+          </a:p>
+          <a:p>
+            <a:r>
+              <a:rPr sz="1800">
+                <a:solidFill>
+                  <a:srgbClr val="FFFFFF"/>
+                </a:solidFill>
+                <a:latin typeface="Calibri"/>
+              </a:rPr>
+              <a:t> </a:t>
+            </a:r>
+          </a:p>
+          <a:p>
+            <a:r>
+              <a:rPr sz="1800">
+                <a:solidFill>
+                  <a:srgbClr val="FFFFFF"/>
+                </a:solidFill>
+                <a:latin typeface="Calibri"/>
+              </a:rPr>
+              <a:t>Scalars (speed, mass, temperature) need only size.</a:t>
+            </a:r>
           </a:p>
         </p:txBody>
       </p:sp>
@@ -4766,15 +5055,13 @@
               <a:buNone/>
             </a:pPr>
             <a:r>
-              <a:rPr lang="en-US" sz="1500" dirty="0">
-                <a:solidFill>
-                  <a:srgbClr val="1E293B"/>
-                </a:solidFill>
-                <a:latin typeface="Calibri" pitchFamily="34" charset="0"/>
-                <a:ea typeface="Calibri" pitchFamily="34" charset="-122"/>
-                <a:cs typeface="Calibri" pitchFamily="34" charset="-120"/>
-              </a:rPr>
-              <a:t>Finding the components of a vector from its graph</a:t>
+              <a:rPr sz="1600">
+                <a:solidFill>
+                  <a:srgbClr val="1E3A5F"/>
+                </a:solidFill>
+                <a:latin typeface="Calibri"/>
+              </a:rPr>
+              <a:t>(Supplementary) Finding the components of a vector given magnitude and angle</a:t>
             </a:r>
             <a:endParaRPr lang="en-US" sz="1500" dirty="0"/>
           </a:p>
@@ -5241,77 +5528,48 @@
               <a:buNone/>
             </a:pPr>
             <a:r>
-              <a:rPr lang="en-US" sz="1500" b="1" dirty="0">
-                <a:solidFill>
-                  <a:srgbClr val="0891B2"/>
-                </a:solidFill>
-                <a:latin typeface="Calibri" pitchFamily="34" charset="0"/>
-                <a:ea typeface="Calibri" pitchFamily="34" charset="-122"/>
-                <a:cs typeface="Calibri" pitchFamily="34" charset="-120"/>
-              </a:rPr>
-              <a:t>Component form:  v = ⟨a, b⟩  or  v = ai + bj</a:t>
+              <a:rPr sz="1600">
+                <a:solidFill>
+                  <a:srgbClr val="1E3A5F"/>
+                </a:solidFill>
+                <a:latin typeface="Calibri"/>
+              </a:rPr>
+              <a:t>Component form:  v = ⟨a, b⟩  =  a i + b j</a:t>
             </a:r>
             <a:endParaRPr lang="en-US" sz="1500" dirty="0"/>
           </a:p>
           <a:p>
-            <a:pPr indent="0" marL="0">
-              <a:spcAft>
-                <a:spcPts val="400"/>
-              </a:spcAft>
-              <a:buNone/>
-            </a:pPr>
-            <a:r>
-              <a:rPr lang="en-US" sz="1500" b="1" dirty="0">
-                <a:solidFill>
-                  <a:srgbClr val="F97316"/>
-                </a:solidFill>
-                <a:latin typeface="Calibri" pitchFamily="34" charset="0"/>
-                <a:ea typeface="Calibri" pitchFamily="34" charset="-122"/>
-                <a:cs typeface="Calibri" pitchFamily="34" charset="-120"/>
-              </a:rPr>
-              <a:t>Magnitude:  |v| = √(a² + b²)</a:t>
-            </a:r>
-            <a:endParaRPr lang="en-US" sz="1500" dirty="0"/>
-          </a:p>
-          <a:p>
-            <a:pPr indent="0" marL="0">
-              <a:spcAft>
-                <a:spcPts val="400"/>
-              </a:spcAft>
-              <a:buNone/>
-            </a:pPr>
-            <a:r>
-              <a:rPr lang="en-US" sz="1500" b="1" dirty="0">
-                <a:solidFill>
-                  <a:srgbClr val="7C3AED"/>
-                </a:solidFill>
-                <a:latin typeface="Calibri" pitchFamily="34" charset="0"/>
-                <a:ea typeface="Calibri" pitchFamily="34" charset="-122"/>
-                <a:cs typeface="Calibri" pitchFamily="34" charset="-120"/>
-              </a:rPr>
-              <a:t>Direction angle:  θ measured counterclockwise from positive x-axis</a:t>
-            </a:r>
-            <a:endParaRPr lang="en-US" sz="1500" dirty="0"/>
-          </a:p>
-          <a:p>
-            <a:pPr indent="0" marL="0">
-              <a:spcAft>
-                <a:spcPts val="400"/>
-              </a:spcAft>
-              <a:buNone/>
-            </a:pPr>
-            <a:r>
-              <a:rPr lang="en-US" sz="1400" dirty="0">
-                <a:solidFill>
-                  <a:srgbClr val="1E293B"/>
-                </a:solidFill>
-                <a:latin typeface="Calibri" pitchFamily="34" charset="0"/>
-                <a:ea typeface="Calibri" pitchFamily="34" charset="-122"/>
-                <a:cs typeface="Calibri" pitchFamily="34" charset="-120"/>
-              </a:rPr>
-              <a:t>Two vectors are equal ⟺ same components</a:t>
-            </a:r>
-            <a:endParaRPr lang="en-US" sz="1500" dirty="0"/>
+            <a:r>
+              <a:rPr sz="1600">
+                <a:solidFill>
+                  <a:srgbClr val="1E3A5F"/>
+                </a:solidFill>
+                <a:latin typeface="Calibri"/>
+              </a:rPr>
+              <a:t>Unit vectors:  i = ⟨1, 0⟩,  j = ⟨0, 1⟩</a:t>
+            </a:r>
+          </a:p>
+          <a:p>
+            <a:r>
+              <a:rPr sz="1600">
+                <a:solidFill>
+                  <a:srgbClr val="1E3A5F"/>
+                </a:solidFill>
+                <a:latin typeface="Calibri"/>
+              </a:rPr>
+              <a:t>Zero vector:  0 = ⟨0, 0⟩  (no magnitude, no direction)</a:t>
+            </a:r>
+          </a:p>
+          <a:p>
+            <a:r>
+              <a:rPr sz="1600">
+                <a:solidFill>
+                  <a:srgbClr val="1E3A5F"/>
+                </a:solidFill>
+                <a:latin typeface="Calibri"/>
+              </a:rPr>
+              <a:t>Magnitude:  |v| = √(a² + b²)     Direction angle:  θ  (CCW from +x)</a:t>
+            </a:r>
           </a:p>
         </p:txBody>
       </p:sp>
@@ -5466,30 +5724,6 @@
           </a:p>
         </p:txBody>
       </p:sp>
-      <p:pic>
-        <p:nvPicPr>
-          <p:cNvPr id="5" name="Image 0" descr="preencoded.png">    </p:cNvPr>
-          <p:cNvPicPr>
-            <a:picLocks noChangeAspect="1"/>
-          </p:cNvPicPr>
-          <p:nvPr/>
-        </p:nvPicPr>
-        <p:blipFill>
-          <a:blip r:embed="rId1"/>
-          <a:stretch>
-            <a:fillRect/>
-          </a:stretch>
-        </p:blipFill>
-        <p:spPr>
-          <a:xfrm>
-            <a:off x="5029200" y="731520"/>
-            <a:ext cx="3931920" cy="3383280"/>
-          </a:xfrm>
-          <a:prstGeom prst="rect">
-            <a:avLst/>
-          </a:prstGeom>
-        </p:spPr>
-      </p:pic>
       <p:sp>
         <p:nvSpPr>
           <p:cNvPr id="6" name="Shape 3"/>
@@ -5648,6 +5882,30 @@
           </a:p>
         </p:txBody>
       </p:sp>
+      <p:pic>
+        <p:nvPicPr>
+          <p:cNvPr id="8" name="Picture 7" descr="s_component_form.png"/>
+          <p:cNvPicPr>
+            <a:picLocks noChangeAspect="1"/>
+          </p:cNvPicPr>
+          <p:nvPr/>
+        </p:nvPicPr>
+        <p:blipFill>
+          <a:blip r:embed="rId4"/>
+          <a:stretch>
+            <a:fillRect/>
+          </a:stretch>
+        </p:blipFill>
+        <p:spPr>
+          <a:xfrm>
+            <a:off x="5029200" y="731520"/>
+            <a:ext cx="3931920" cy="3383280"/>
+          </a:xfrm>
+          <a:prstGeom prst="rect">
+            <a:avLst/>
+          </a:prstGeom>
+        </p:spPr>
+      </p:pic>
     </p:spTree>
   </p:cSld>
   <p:clrMapOvr>
@@ -5705,15 +5963,13 @@
               <a:buNone/>
             </a:pPr>
             <a:r>
-              <a:rPr lang="en-US" sz="2800" b="1" dirty="0">
+              <a:rPr sz="3200" b="1">
                 <a:solidFill>
                   <a:srgbClr val="1E3A5F"/>
                 </a:solidFill>
-                <a:latin typeface="Georgia" pitchFamily="34" charset="0"/>
-                <a:ea typeface="Georgia" pitchFamily="34" charset="-122"/>
-                <a:cs typeface="Georgia" pitchFamily="34" charset="-120"/>
-              </a:rPr>
-              <a:t>Finding Components from a Graph</a:t>
+                <a:latin typeface="Georgia"/>
+              </a:rPr>
+              <a:t>Components from |v| and θ</a:t>
             </a:r>
             <a:endParaRPr lang="en-US" sz="2800" dirty="0"/>
           </a:p>
@@ -5791,15 +6047,13 @@
               <a:buNone/>
             </a:pPr>
             <a:r>
-              <a:rPr lang="en-US" sz="1500" b="1" dirty="0">
+              <a:rPr sz="2000" b="1">
                 <a:solidFill>
                   <a:srgbClr val="0891B2"/>
                 </a:solidFill>
-                <a:latin typeface="Georgia" pitchFamily="34" charset="0"/>
-                <a:ea typeface="Georgia" pitchFamily="34" charset="-122"/>
-                <a:cs typeface="Georgia" pitchFamily="34" charset="-120"/>
-              </a:rPr>
-              <a:t>Method 1: From Points</a:t>
+                <a:latin typeface="Calibri"/>
+              </a:rPr>
+              <a:t>Given |v| and θ</a:t>
             </a:r>
             <a:endParaRPr lang="en-US" sz="1500" dirty="0"/>
           </a:p>
@@ -5834,72 +6088,50 @@
               <a:buChar char="•"/>
             </a:pPr>
             <a:r>
-              <a:rPr lang="en-US" sz="1400" dirty="0">
-                <a:solidFill>
-                  <a:srgbClr val="1E293B"/>
-                </a:solidFill>
-                <a:latin typeface="Calibri" pitchFamily="34" charset="0"/>
-                <a:ea typeface="Calibri" pitchFamily="34" charset="-122"/>
-                <a:cs typeface="Calibri" pitchFamily="34" charset="-120"/>
-              </a:rPr>
-              <a:t>1. Read tail (initial) coordinates</a:t>
+              <a:rPr sz="1700">
+                <a:solidFill>
+                  <a:srgbClr val="1E3A5F"/>
+                </a:solidFill>
+                <a:latin typeface="Calibri"/>
+              </a:rPr>
+              <a:t>vₓ = |v| cos θ</a:t>
             </a:r>
             <a:endParaRPr lang="en-US" sz="1400" dirty="0"/>
           </a:p>
           <a:p>
-            <a:pPr marL="342900" indent="-342900">
-              <a:spcAft>
-                <a:spcPts val="600"/>
-              </a:spcAft>
-              <a:buSzPct val="100000"/>
-              <a:buChar char="•"/>
-            </a:pPr>
-            <a:r>
-              <a:rPr lang="en-US" sz="1400" dirty="0">
-                <a:solidFill>
-                  <a:srgbClr val="1E293B"/>
-                </a:solidFill>
-                <a:latin typeface="Calibri" pitchFamily="34" charset="0"/>
-                <a:ea typeface="Calibri" pitchFamily="34" charset="-122"/>
-                <a:cs typeface="Calibri" pitchFamily="34" charset="-120"/>
-              </a:rPr>
-              <a:t>2. Read tip (terminal) coordinates</a:t>
-            </a:r>
-            <a:endParaRPr lang="en-US" sz="1400" dirty="0"/>
-          </a:p>
-          <a:p>
-            <a:pPr marL="342900" indent="-342900">
-              <a:spcAft>
-                <a:spcPts val="600"/>
-              </a:spcAft>
-              <a:buSzPct val="100000"/>
-              <a:buChar char="•"/>
-            </a:pPr>
-            <a:r>
-              <a:rPr lang="en-US" sz="1400" dirty="0">
-                <a:solidFill>
-                  <a:srgbClr val="1E293B"/>
-                </a:solidFill>
-                <a:latin typeface="Calibri" pitchFamily="34" charset="0"/>
-                <a:ea typeface="Calibri" pitchFamily="34" charset="-122"/>
-                <a:cs typeface="Calibri" pitchFamily="34" charset="-120"/>
-              </a:rPr>
-              <a:t>3. Subtract: ⟨x_tip − x_tail, y_tip − y_tail⟩</a:t>
-            </a:r>
-            <a:endParaRPr lang="en-US" sz="1400" dirty="0"/>
-          </a:p>
-        </p:txBody>
-      </p:sp>
-      <p:sp>
-        <p:nvSpPr>
-          <p:cNvPr id="7" name="Shape 5"/>
-          <p:cNvSpPr/>
-          <p:nvPr/>
-        </p:nvSpPr>
-        <p:spPr>
-          <a:xfrm>
-            <a:off x="4754880" y="914400"/>
-            <a:ext cx="3931920" cy="2011680"/>
+            <a:r>
+              <a:rPr sz="1700">
+                <a:solidFill>
+                  <a:srgbClr val="1E3A5F"/>
+                </a:solidFill>
+                <a:latin typeface="Calibri"/>
+              </a:rPr>
+              <a:t>vᵧ = |v| sin θ</a:t>
+            </a:r>
+          </a:p>
+          <a:p>
+            <a:r>
+              <a:rPr sz="1700">
+                <a:solidFill>
+                  <a:srgbClr val="1E3A5F"/>
+                </a:solidFill>
+                <a:latin typeface="Calibri"/>
+              </a:rPr>
+              <a:t>v = ⟨|v| cos θ, |v| sin θ⟩</a:t>
+            </a:r>
+          </a:p>
+        </p:txBody>
+      </p:sp>
+      <p:sp>
+        <p:nvSpPr>
+          <p:cNvPr id="11" name="Shape 9"/>
+          <p:cNvSpPr/>
+          <p:nvPr/>
+        </p:nvSpPr>
+        <p:spPr>
+          <a:xfrm>
+            <a:off x="457200" y="3200400"/>
+            <a:ext cx="8229600" cy="1554480"/>
           </a:xfrm>
           <a:prstGeom prst="rect">
             <a:avLst/>
@@ -5919,174 +6151,6 @@
       </p:sp>
       <p:sp>
         <p:nvSpPr>
-          <p:cNvPr id="8" name="Shape 6"/>
-          <p:cNvSpPr/>
-          <p:nvPr/>
-        </p:nvSpPr>
-        <p:spPr>
-          <a:xfrm>
-            <a:off x="4754880" y="914400"/>
-            <a:ext cx="64008" cy="2011680"/>
-          </a:xfrm>
-          <a:prstGeom prst="rect">
-            <a:avLst/>
-          </a:prstGeom>
-          <a:solidFill>
-            <a:srgbClr val="F97316"/>
-          </a:solidFill>
-          <a:ln/>
-        </p:spPr>
-      </p:sp>
-      <p:sp>
-        <p:nvSpPr>
-          <p:cNvPr id="9" name="Text 7"/>
-          <p:cNvSpPr/>
-          <p:nvPr/>
-        </p:nvSpPr>
-        <p:spPr>
-          <a:xfrm>
-            <a:off x="4983480" y="1005840"/>
-            <a:ext cx="3200400" cy="320040"/>
-          </a:xfrm>
-          <a:prstGeom prst="rect">
-            <a:avLst/>
-          </a:prstGeom>
-          <a:noFill/>
-          <a:ln/>
-        </p:spPr>
-        <p:txBody>
-          <a:bodyPr wrap="square" lIns="0" tIns="0" rIns="0" bIns="0" rtlCol="0" anchor="ctr"/>
-          <a:lstStyle/>
-          <a:p>
-            <a:pPr indent="0" marL="0">
-              <a:buNone/>
-            </a:pPr>
-            <a:r>
-              <a:rPr lang="en-US" sz="1500" b="1" dirty="0">
-                <a:solidFill>
-                  <a:srgbClr val="F97316"/>
-                </a:solidFill>
-                <a:latin typeface="Georgia" pitchFamily="34" charset="0"/>
-                <a:ea typeface="Georgia" pitchFamily="34" charset="-122"/>
-                <a:cs typeface="Georgia" pitchFamily="34" charset="-120"/>
-              </a:rPr>
-              <a:t>Method 2: From |v| and θ</a:t>
-            </a:r>
-            <a:endParaRPr lang="en-US" sz="1500" dirty="0"/>
-          </a:p>
-        </p:txBody>
-      </p:sp>
-      <p:sp>
-        <p:nvSpPr>
-          <p:cNvPr id="10" name="Text 8"/>
-          <p:cNvSpPr/>
-          <p:nvPr/>
-        </p:nvSpPr>
-        <p:spPr>
-          <a:xfrm>
-            <a:off x="4983480" y="1463040"/>
-            <a:ext cx="3383280" cy="1188720"/>
-          </a:xfrm>
-          <a:prstGeom prst="rect">
-            <a:avLst/>
-          </a:prstGeom>
-          <a:noFill/>
-          <a:ln/>
-        </p:spPr>
-        <p:txBody>
-          <a:bodyPr wrap="square" rtlCol="0" anchor="ctr"/>
-          <a:lstStyle/>
-          <a:p>
-            <a:pPr indent="0" marL="0">
-              <a:spcAft>
-                <a:spcPts val="600"/>
-              </a:spcAft>
-              <a:buNone/>
-            </a:pPr>
-            <a:r>
-              <a:rPr lang="en-US" sz="1500" b="1" dirty="0">
-                <a:solidFill>
-                  <a:srgbClr val="0891B2"/>
-                </a:solidFill>
-                <a:latin typeface="Calibri" pitchFamily="34" charset="0"/>
-                <a:ea typeface="Calibri" pitchFamily="34" charset="-122"/>
-                <a:cs typeface="Calibri" pitchFamily="34" charset="-120"/>
-              </a:rPr>
-              <a:t>Horizontal: vₓ = |v| cos θ</a:t>
-            </a:r>
-            <a:endParaRPr lang="en-US" sz="1500" dirty="0"/>
-          </a:p>
-          <a:p>
-            <a:pPr indent="0" marL="0">
-              <a:spcAft>
-                <a:spcPts val="600"/>
-              </a:spcAft>
-              <a:buNone/>
-            </a:pPr>
-            <a:r>
-              <a:rPr lang="en-US" sz="1500" b="1" dirty="0">
-                <a:solidFill>
-                  <a:srgbClr val="7C3AED"/>
-                </a:solidFill>
-                <a:latin typeface="Calibri" pitchFamily="34" charset="0"/>
-                <a:ea typeface="Calibri" pitchFamily="34" charset="-122"/>
-                <a:cs typeface="Calibri" pitchFamily="34" charset="-120"/>
-              </a:rPr>
-              <a:t>Vertical:     vᵧ = |v| sin θ</a:t>
-            </a:r>
-            <a:endParaRPr lang="en-US" sz="1500" dirty="0"/>
-          </a:p>
-          <a:p>
-            <a:pPr indent="0" marL="0">
-              <a:spcAft>
-                <a:spcPts val="600"/>
-              </a:spcAft>
-              <a:buNone/>
-            </a:pPr>
-            <a:r>
-              <a:rPr lang="en-US" sz="1500" b="1" dirty="0">
-                <a:solidFill>
-                  <a:srgbClr val="F97316"/>
-                </a:solidFill>
-                <a:latin typeface="Georgia" pitchFamily="34" charset="0"/>
-                <a:ea typeface="Georgia" pitchFamily="34" charset="-122"/>
-                <a:cs typeface="Georgia" pitchFamily="34" charset="-120"/>
-              </a:rPr>
-              <a:t>v = ⟨|v| cos θ, |v| sin θ⟩</a:t>
-            </a:r>
-            <a:endParaRPr lang="en-US" sz="1500" dirty="0"/>
-          </a:p>
-        </p:txBody>
-      </p:sp>
-      <p:sp>
-        <p:nvSpPr>
-          <p:cNvPr id="11" name="Shape 9"/>
-          <p:cNvSpPr/>
-          <p:nvPr/>
-        </p:nvSpPr>
-        <p:spPr>
-          <a:xfrm>
-            <a:off x="457200" y="3200400"/>
-            <a:ext cx="8229600" cy="1554480"/>
-          </a:xfrm>
-          <a:prstGeom prst="rect">
-            <a:avLst/>
-          </a:prstGeom>
-          <a:solidFill>
-            <a:srgbClr val="FFFFFF"/>
-          </a:solidFill>
-          <a:ln/>
-          <a:effectLst>
-            <a:outerShdw sx="100000" sy="100000" kx="0" ky="0" algn="bl" rotWithShape="0" blurRad="76200" dist="25400" dir="8100000">
-              <a:srgbClr val="000000">
-                <a:alpha val="10000"/>
-              </a:srgbClr>
-            </a:outerShdw>
-          </a:effectLst>
-        </p:spPr>
-      </p:sp>
-      <p:sp>
-        <p:nvSpPr>
           <p:cNvPr id="12" name="Text 10"/>
           <p:cNvSpPr/>
           <p:nvPr/>
@@ -6109,30 +6173,17 @@
             <a:pPr indent="0" marL="0">
               <a:buNone/>
             </a:pPr>
-            <a:r>
-              <a:rPr lang="en-US" sz="1500" b="1" dirty="0">
-                <a:solidFill>
-                  <a:srgbClr val="1E3A5F"/>
-                </a:solidFill>
-                <a:latin typeface="Georgia" pitchFamily="34" charset="0"/>
-                <a:ea typeface="Georgia" pitchFamily="34" charset="-122"/>
-                <a:cs typeface="Georgia" pitchFamily="34" charset="-120"/>
-              </a:rPr>
-              <a:t>Example:  </a:t>
-            </a:r>
-            <a:pPr indent="0" marL="0">
-              <a:buNone/>
-            </a:pPr>
-            <a:r>
-              <a:rPr lang="en-US" sz="1500" dirty="0">
-                <a:solidFill>
-                  <a:srgbClr val="1E293B"/>
-                </a:solidFill>
-                <a:latin typeface="Calibri" pitchFamily="34" charset="0"/>
-                <a:ea typeface="Calibri" pitchFamily="34" charset="-122"/>
-                <a:cs typeface="Calibri" pitchFamily="34" charset="-120"/>
-              </a:rPr>
-              <a:t>Vector from (1, 2) to (−3, 5)</a:t>
+            <a:pPr indent="0" marL="0">
+              <a:buNone/>
+            </a:pPr>
+            <a:r>
+              <a:rPr sz="1800" b="1">
+                <a:solidFill>
+                  <a:srgbClr val="F97316"/>
+                </a:solidFill>
+                <a:latin typeface="Calibri"/>
+              </a:rPr>
+              <a:t>Example:  |v| = 5,  θ = 53.1°</a:t>
             </a:r>
             <a:endParaRPr lang="en-US" sz="1500" dirty="0"/>
           </a:p>
@@ -6166,60 +6217,64 @@
               <a:buNone/>
             </a:pPr>
             <a:r>
-              <a:rPr lang="en-US" sz="1500" dirty="0">
-                <a:solidFill>
-                  <a:srgbClr val="1E293B"/>
-                </a:solidFill>
-                <a:latin typeface="Calibri" pitchFamily="34" charset="0"/>
-                <a:ea typeface="Calibri" pitchFamily="34" charset="-122"/>
-                <a:cs typeface="Calibri" pitchFamily="34" charset="-120"/>
-              </a:rPr>
-              <a:t>v = ⟨−3 − 1, 5 − 2⟩ = ⟨−4, 3⟩</a:t>
+              <a:rPr sz="1600">
+                <a:solidFill>
+                  <a:srgbClr val="1E3A5F"/>
+                </a:solidFill>
+                <a:latin typeface="Calibri"/>
+              </a:rPr>
+              <a:t>vₓ = 5 cos 53.1° ≈ 3</a:t>
             </a:r>
             <a:endParaRPr lang="en-US" sz="1500" dirty="0"/>
           </a:p>
           <a:p>
-            <a:pPr indent="0" marL="0">
-              <a:spcAft>
-                <a:spcPts val="300"/>
-              </a:spcAft>
-              <a:buNone/>
-            </a:pPr>
-            <a:r>
-              <a:rPr lang="en-US" sz="1400" dirty="0">
-                <a:solidFill>
-                  <a:srgbClr val="0891B2"/>
-                </a:solidFill>
-                <a:latin typeface="Calibri" pitchFamily="34" charset="0"/>
-                <a:ea typeface="Calibri" pitchFamily="34" charset="-122"/>
-                <a:cs typeface="Calibri" pitchFamily="34" charset="-120"/>
-              </a:rPr>
-              <a:t>|v| = √(16 + 9) = 5</a:t>
-            </a:r>
-            <a:endParaRPr lang="en-US" sz="1500" dirty="0"/>
-          </a:p>
-          <a:p>
-            <a:pPr indent="0" marL="0">
-              <a:spcAft>
-                <a:spcPts val="300"/>
-              </a:spcAft>
-              <a:buNone/>
-            </a:pPr>
-            <a:r>
-              <a:rPr lang="en-US" sz="1400" dirty="0">
-                <a:solidFill>
-                  <a:srgbClr val="F97316"/>
-                </a:solidFill>
-                <a:latin typeface="Calibri" pitchFamily="34" charset="0"/>
-                <a:ea typeface="Calibri" pitchFamily="34" charset="-122"/>
-                <a:cs typeface="Calibri" pitchFamily="34" charset="-120"/>
-              </a:rPr>
-              <a:t>θ = tan⁻¹(3/−4) ≈ −36.9° → Q II: +180° → θ ≈ 143.1°</a:t>
-            </a:r>
-            <a:endParaRPr lang="en-US" sz="1500" dirty="0"/>
-          </a:p>
-        </p:txBody>
-      </p:sp>
+            <a:r>
+              <a:rPr sz="1600">
+                <a:solidFill>
+                  <a:srgbClr val="1E3A5F"/>
+                </a:solidFill>
+                <a:latin typeface="Calibri"/>
+              </a:rPr>
+              <a:t>vᵧ = 5 sin 53.1° ≈ 4</a:t>
+            </a:r>
+          </a:p>
+          <a:p>
+            <a:r>
+              <a:rPr sz="1600">
+                <a:solidFill>
+                  <a:srgbClr val="1E3A5F"/>
+                </a:solidFill>
+                <a:latin typeface="Calibri"/>
+              </a:rPr>
+              <a:t>v = ⟨3, 4⟩</a:t>
+            </a:r>
+          </a:p>
+        </p:txBody>
+      </p:sp>
+      <p:pic>
+        <p:nvPicPr>
+          <p:cNvPr id="14" name="Picture 13" descr="s_components_from_mag_theta.png"/>
+          <p:cNvPicPr>
+            <a:picLocks noChangeAspect="1"/>
+          </p:cNvPicPr>
+          <p:nvPr/>
+        </p:nvPicPr>
+        <p:blipFill>
+          <a:blip r:embed="rId3"/>
+          <a:stretch>
+            <a:fillRect/>
+          </a:stretch>
+        </p:blipFill>
+        <p:spPr>
+          <a:xfrm>
+            <a:off x="5600000" y="914400"/>
+            <a:ext cx="2468880" cy="2125543"/>
+          </a:xfrm>
+          <a:prstGeom prst="rect">
+            <a:avLst/>
+          </a:prstGeom>
+        </p:spPr>
+      </p:pic>
     </p:spTree>
   </p:cSld>
   <p:clrMapOvr>
@@ -6666,30 +6721,6 @@
           </a:p>
         </p:txBody>
       </p:sp>
-      <p:pic>
-        <p:nvPicPr>
-          <p:cNvPr id="15" name="Image 0" descr="preencoded.png">    </p:cNvPr>
-          <p:cNvPicPr>
-            <a:picLocks noChangeAspect="1"/>
-          </p:cNvPicPr>
-          <p:nvPr/>
-        </p:nvPicPr>
-        <p:blipFill>
-          <a:blip r:embed="rId1"/>
-          <a:stretch>
-            <a:fillRect/>
-          </a:stretch>
-        </p:blipFill>
-        <p:spPr>
-          <a:xfrm>
-            <a:off x="4846320" y="548640"/>
-            <a:ext cx="4114800" cy="3383280"/>
-          </a:xfrm>
-          <a:prstGeom prst="rect">
-            <a:avLst/>
-          </a:prstGeom>
-        </p:spPr>
-      </p:pic>
       <p:sp>
         <p:nvSpPr>
           <p:cNvPr id="16" name="Shape 13"/>
@@ -6867,6 +6898,30 @@
           </a:p>
         </p:txBody>
       </p:sp>
+      <p:pic>
+        <p:nvPicPr>
+          <p:cNvPr id="19" name="Picture 18" descr="s_vector_addition.png"/>
+          <p:cNvPicPr>
+            <a:picLocks noChangeAspect="1"/>
+          </p:cNvPicPr>
+          <p:nvPr/>
+        </p:nvPicPr>
+        <p:blipFill>
+          <a:blip r:embed="rId4"/>
+          <a:stretch>
+            <a:fillRect/>
+          </a:stretch>
+        </p:blipFill>
+        <p:spPr>
+          <a:xfrm>
+            <a:off x="4846320" y="548640"/>
+            <a:ext cx="4114800" cy="3383280"/>
+          </a:xfrm>
+          <a:prstGeom prst="rect">
+            <a:avLst/>
+          </a:prstGeom>
+        </p:spPr>
+      </p:pic>
     </p:spTree>
   </p:cSld>
   <p:clrMapOvr>
@@ -7027,30 +7082,6 @@
           </a:p>
         </p:txBody>
       </p:sp>
-      <p:pic>
-        <p:nvPicPr>
-          <p:cNvPr id="5" name="Image 0" descr="preencoded.png">    </p:cNvPr>
-          <p:cNvPicPr>
-            <a:picLocks noChangeAspect="1"/>
-          </p:cNvPicPr>
-          <p:nvPr/>
-        </p:nvPicPr>
-        <p:blipFill>
-          <a:blip r:embed="rId1"/>
-          <a:stretch>
-            <a:fillRect/>
-          </a:stretch>
-        </p:blipFill>
-        <p:spPr>
-          <a:xfrm>
-            <a:off x="5029200" y="731520"/>
-            <a:ext cx="3931920" cy="3566160"/>
-          </a:xfrm>
-          <a:prstGeom prst="rect">
-            <a:avLst/>
-          </a:prstGeom>
-        </p:spPr>
-      </p:pic>
       <p:sp>
         <p:nvSpPr>
           <p:cNvPr id="6" name="Shape 3"/>
@@ -7228,6 +7259,30 @@
           </a:p>
         </p:txBody>
       </p:sp>
+      <p:pic>
+        <p:nvPicPr>
+          <p:cNvPr id="9" name="Picture 8" descr="s_magnitude_direction.png"/>
+          <p:cNvPicPr>
+            <a:picLocks noChangeAspect="1"/>
+          </p:cNvPicPr>
+          <p:nvPr/>
+        </p:nvPicPr>
+        <p:blipFill>
+          <a:blip r:embed="rId4"/>
+          <a:stretch>
+            <a:fillRect/>
+          </a:stretch>
+        </p:blipFill>
+        <p:spPr>
+          <a:xfrm>
+            <a:off x="5029200" y="731520"/>
+            <a:ext cx="3931920" cy="3566160"/>
+          </a:xfrm>
+          <a:prstGeom prst="rect">
+            <a:avLst/>
+          </a:prstGeom>
+        </p:spPr>
+      </p:pic>
     </p:spTree>
   </p:cSld>
   <p:clrMapOvr>
@@ -7299,30 +7354,6 @@
           </a:p>
         </p:txBody>
       </p:sp>
-      <p:pic>
-        <p:nvPicPr>
-          <p:cNvPr id="3" name="Image 0" descr="preencoded.png">    </p:cNvPr>
-          <p:cNvPicPr>
-            <a:picLocks noChangeAspect="1"/>
-          </p:cNvPicPr>
-          <p:nvPr/>
-        </p:nvPicPr>
-        <p:blipFill>
-          <a:blip r:embed="rId1"/>
-          <a:stretch>
-            <a:fillRect/>
-          </a:stretch>
-        </p:blipFill>
-        <p:spPr>
-          <a:xfrm>
-            <a:off x="274320" y="640080"/>
-            <a:ext cx="4572000" cy="4206240"/>
-          </a:xfrm>
-          <a:prstGeom prst="rect">
-            <a:avLst/>
-          </a:prstGeom>
-        </p:spPr>
-      </p:pic>
       <p:sp>
         <p:nvSpPr>
           <p:cNvPr id="4" name="Shape 1"/>
@@ -7857,6 +7888,30 @@
           </a:p>
         </p:txBody>
       </p:sp>
+      <p:pic>
+        <p:nvPicPr>
+          <p:cNvPr id="18" name="Picture 17" descr="s_quadrant_arrows.png"/>
+          <p:cNvPicPr>
+            <a:picLocks noChangeAspect="1"/>
+          </p:cNvPicPr>
+          <p:nvPr/>
+        </p:nvPicPr>
+        <p:blipFill>
+          <a:blip r:embed="rId4"/>
+          <a:stretch>
+            <a:fillRect/>
+          </a:stretch>
+        </p:blipFill>
+        <p:spPr>
+          <a:xfrm>
+            <a:off x="274320" y="640080"/>
+            <a:ext cx="4572000" cy="4206240"/>
+          </a:xfrm>
+          <a:prstGeom prst="rect">
+            <a:avLst/>
+          </a:prstGeom>
+        </p:spPr>
+      </p:pic>
     </p:spTree>
   </p:cSld>
   <p:clrMapOvr>

--- a/slides/Math130Unit3D.pptx
+++ b/slides/Math130Unit3D.pptx
@@ -5698,7 +5698,7 @@
             <a:r>
               <a:rPr lang="en-US" sz="1400" b="1" dirty="0">
                 <a:solidFill>
-                  <a:srgbClr val="F97316"/>
+                  <a:srgbClr val="0891B2"/>
                 </a:solidFill>
                 <a:latin typeface="Georgia" pitchFamily="34" charset="0"/>
                 <a:ea typeface="Georgia" pitchFamily="34" charset="-122"/>
@@ -5781,7 +5781,7 @@
             <a:r>
               <a:rPr lang="en-US" sz="1500" b="1" dirty="0">
                 <a:solidFill>
-                  <a:srgbClr val="0891B2"/>
+                  <a:srgbClr val="F97316"/>
                 </a:solidFill>
                 <a:latin typeface="Georgia" pitchFamily="34" charset="0"/>
                 <a:ea typeface="Georgia" pitchFamily="34" charset="-122"/>
@@ -7070,7 +7070,7 @@
             <a:r>
               <a:rPr lang="en-US" sz="1600" b="1" dirty="0">
                 <a:solidFill>
-                  <a:srgbClr val="F97316"/>
+                  <a:srgbClr val="0891B2"/>
                 </a:solidFill>
                 <a:latin typeface="Georgia" pitchFamily="34" charset="0"/>
                 <a:ea typeface="Georgia" pitchFamily="34" charset="-122"/>
@@ -7406,485 +7406,15 @@
               <a:buNone/>
             </a:pPr>
             <a:r>
-              <a:rPr lang="en-US" sz="1700" b="1" dirty="0">
+              <a:rPr sz="2000" b="1">
                 <a:solidFill>
                   <a:srgbClr val="1E3A5F"/>
                 </a:solidFill>
-                <a:latin typeface="Georgia" pitchFamily="34" charset="0"/>
-                <a:ea typeface="Georgia" pitchFamily="34" charset="-122"/>
-                <a:cs typeface="Georgia" pitchFamily="34" charset="-120"/>
-              </a:rPr>
-              <a:t>Examples</a:t>
+                <a:latin typeface="Georgia"/>
+              </a:rPr>
+              <a:t>One Rule for θ</a:t>
             </a:r>
             <a:endParaRPr lang="en-US" sz="1700" dirty="0"/>
-          </a:p>
-        </p:txBody>
-      </p:sp>
-      <p:sp>
-        <p:nvSpPr>
-          <p:cNvPr id="6" name="Text 3"/>
-          <p:cNvSpPr/>
-          <p:nvPr/>
-        </p:nvSpPr>
-        <p:spPr>
-          <a:xfrm>
-            <a:off x="5212080" y="1463040"/>
-            <a:ext cx="1371600" cy="228600"/>
-          </a:xfrm>
-          <a:prstGeom prst="rect">
-            <a:avLst/>
-          </a:prstGeom>
-          <a:noFill/>
-          <a:ln/>
-        </p:spPr>
-        <p:txBody>
-          <a:bodyPr wrap="square" lIns="0" tIns="0" rIns="0" bIns="0" rtlCol="0" anchor="ctr"/>
-          <a:lstStyle/>
-          <a:p>
-            <a:pPr indent="0" marL="0">
-              <a:buNone/>
-            </a:pPr>
-            <a:r>
-              <a:rPr lang="en-US" sz="1300" b="1" dirty="0">
-                <a:solidFill>
-                  <a:srgbClr val="0891B2"/>
-                </a:solidFill>
-                <a:latin typeface="Georgia" pitchFamily="34" charset="0"/>
-                <a:ea typeface="Georgia" pitchFamily="34" charset="-122"/>
-                <a:cs typeface="Georgia" pitchFamily="34" charset="-120"/>
-              </a:rPr>
-              <a:t>⟨3, 4⟩</a:t>
-            </a:r>
-            <a:endParaRPr lang="en-US" sz="1300" dirty="0"/>
-          </a:p>
-        </p:txBody>
-      </p:sp>
-      <p:sp>
-        <p:nvSpPr>
-          <p:cNvPr id="7" name="Text 4"/>
-          <p:cNvSpPr/>
-          <p:nvPr/>
-        </p:nvSpPr>
-        <p:spPr>
-          <a:xfrm>
-            <a:off x="6583680" y="1463040"/>
-            <a:ext cx="548640" cy="228600"/>
-          </a:xfrm>
-          <a:prstGeom prst="rect">
-            <a:avLst/>
-          </a:prstGeom>
-          <a:noFill/>
-          <a:ln/>
-        </p:spPr>
-        <p:txBody>
-          <a:bodyPr wrap="square" lIns="0" tIns="0" rIns="0" bIns="0" rtlCol="0" anchor="ctr"/>
-          <a:lstStyle/>
-          <a:p>
-            <a:pPr indent="0" marL="0">
-              <a:buNone/>
-            </a:pPr>
-            <a:r>
-              <a:rPr lang="en-US" sz="1200" dirty="0">
-                <a:solidFill>
-                  <a:srgbClr val="64748B"/>
-                </a:solidFill>
-                <a:latin typeface="Calibri" pitchFamily="34" charset="0"/>
-                <a:ea typeface="Calibri" pitchFamily="34" charset="-122"/>
-                <a:cs typeface="Calibri" pitchFamily="34" charset="-120"/>
-              </a:rPr>
-              <a:t>Q I</a:t>
-            </a:r>
-            <a:endParaRPr lang="en-US" sz="1200" dirty="0"/>
-          </a:p>
-        </p:txBody>
-      </p:sp>
-      <p:sp>
-        <p:nvSpPr>
-          <p:cNvPr id="8" name="Text 5"/>
-          <p:cNvSpPr/>
-          <p:nvPr/>
-        </p:nvSpPr>
-        <p:spPr>
-          <a:xfrm>
-            <a:off x="5212080" y="1737360"/>
-            <a:ext cx="3200400" cy="274320"/>
-          </a:xfrm>
-          <a:prstGeom prst="rect">
-            <a:avLst/>
-          </a:prstGeom>
-          <a:noFill/>
-          <a:ln/>
-        </p:spPr>
-        <p:txBody>
-          <a:bodyPr wrap="square" lIns="0" tIns="0" rIns="0" bIns="0" rtlCol="0" anchor="ctr"/>
-          <a:lstStyle/>
-          <a:p>
-            <a:pPr indent="0" marL="0">
-              <a:buNone/>
-            </a:pPr>
-            <a:r>
-              <a:rPr lang="en-US" sz="1400" b="1" dirty="0">
-                <a:solidFill>
-                  <a:srgbClr val="0891B2"/>
-                </a:solidFill>
-                <a:latin typeface="Calibri" pitchFamily="34" charset="0"/>
-                <a:ea typeface="Calibri" pitchFamily="34" charset="-122"/>
-                <a:cs typeface="Calibri" pitchFamily="34" charset="-120"/>
-              </a:rPr>
-              <a:t>θ ≈ 53.1°</a:t>
-            </a:r>
-            <a:endParaRPr lang="en-US" sz="1400" dirty="0"/>
-          </a:p>
-        </p:txBody>
-      </p:sp>
-      <p:sp>
-        <p:nvSpPr>
-          <p:cNvPr id="9" name="Text 6"/>
-          <p:cNvSpPr/>
-          <p:nvPr/>
-        </p:nvSpPr>
-        <p:spPr>
-          <a:xfrm>
-            <a:off x="5212080" y="2240280"/>
-            <a:ext cx="1371600" cy="228600"/>
-          </a:xfrm>
-          <a:prstGeom prst="rect">
-            <a:avLst/>
-          </a:prstGeom>
-          <a:noFill/>
-          <a:ln/>
-        </p:spPr>
-        <p:txBody>
-          <a:bodyPr wrap="square" lIns="0" tIns="0" rIns="0" bIns="0" rtlCol="0" anchor="ctr"/>
-          <a:lstStyle/>
-          <a:p>
-            <a:pPr indent="0" marL="0">
-              <a:buNone/>
-            </a:pPr>
-            <a:r>
-              <a:rPr lang="en-US" sz="1300" b="1" dirty="0">
-                <a:solidFill>
-                  <a:srgbClr val="7C3AED"/>
-                </a:solidFill>
-                <a:latin typeface="Georgia" pitchFamily="34" charset="0"/>
-                <a:ea typeface="Georgia" pitchFamily="34" charset="-122"/>
-                <a:cs typeface="Georgia" pitchFamily="34" charset="-120"/>
-              </a:rPr>
-              <a:t>⟨−5, 12⟩</a:t>
-            </a:r>
-            <a:endParaRPr lang="en-US" sz="1300" dirty="0"/>
-          </a:p>
-        </p:txBody>
-      </p:sp>
-      <p:sp>
-        <p:nvSpPr>
-          <p:cNvPr id="10" name="Text 7"/>
-          <p:cNvSpPr/>
-          <p:nvPr/>
-        </p:nvSpPr>
-        <p:spPr>
-          <a:xfrm>
-            <a:off x="6583680" y="2240280"/>
-            <a:ext cx="548640" cy="228600"/>
-          </a:xfrm>
-          <a:prstGeom prst="rect">
-            <a:avLst/>
-          </a:prstGeom>
-          <a:noFill/>
-          <a:ln/>
-        </p:spPr>
-        <p:txBody>
-          <a:bodyPr wrap="square" lIns="0" tIns="0" rIns="0" bIns="0" rtlCol="0" anchor="ctr"/>
-          <a:lstStyle/>
-          <a:p>
-            <a:pPr indent="0" marL="0">
-              <a:buNone/>
-            </a:pPr>
-            <a:r>
-              <a:rPr lang="en-US" sz="1200" dirty="0">
-                <a:solidFill>
-                  <a:srgbClr val="64748B"/>
-                </a:solidFill>
-                <a:latin typeface="Calibri" pitchFamily="34" charset="0"/>
-                <a:ea typeface="Calibri" pitchFamily="34" charset="-122"/>
-                <a:cs typeface="Calibri" pitchFamily="34" charset="-120"/>
-              </a:rPr>
-              <a:t>Q II</a:t>
-            </a:r>
-            <a:endParaRPr lang="en-US" sz="1200" dirty="0"/>
-          </a:p>
-        </p:txBody>
-      </p:sp>
-      <p:sp>
-        <p:nvSpPr>
-          <p:cNvPr id="11" name="Text 8"/>
-          <p:cNvSpPr/>
-          <p:nvPr/>
-        </p:nvSpPr>
-        <p:spPr>
-          <a:xfrm>
-            <a:off x="5212080" y="2514600"/>
-            <a:ext cx="3200400" cy="274320"/>
-          </a:xfrm>
-          <a:prstGeom prst="rect">
-            <a:avLst/>
-          </a:prstGeom>
-          <a:noFill/>
-          <a:ln/>
-        </p:spPr>
-        <p:txBody>
-          <a:bodyPr wrap="square" lIns="0" tIns="0" rIns="0" bIns="0" rtlCol="0" anchor="ctr"/>
-          <a:lstStyle/>
-          <a:p>
-            <a:pPr indent="0" marL="0">
-              <a:buNone/>
-            </a:pPr>
-            <a:r>
-              <a:rPr lang="en-US" sz="1400" b="1" dirty="0">
-                <a:solidFill>
-                  <a:srgbClr val="7C3AED"/>
-                </a:solidFill>
-                <a:latin typeface="Calibri" pitchFamily="34" charset="0"/>
-                <a:ea typeface="Calibri" pitchFamily="34" charset="-122"/>
-                <a:cs typeface="Calibri" pitchFamily="34" charset="-120"/>
-              </a:rPr>
-              <a:t>θ ≈ 112.6°</a:t>
-            </a:r>
-            <a:endParaRPr lang="en-US" sz="1400" dirty="0"/>
-          </a:p>
-        </p:txBody>
-      </p:sp>
-      <p:sp>
-        <p:nvSpPr>
-          <p:cNvPr id="12" name="Text 9"/>
-          <p:cNvSpPr/>
-          <p:nvPr/>
-        </p:nvSpPr>
-        <p:spPr>
-          <a:xfrm>
-            <a:off x="5212080" y="3017520"/>
-            <a:ext cx="1371600" cy="228600"/>
-          </a:xfrm>
-          <a:prstGeom prst="rect">
-            <a:avLst/>
-          </a:prstGeom>
-          <a:noFill/>
-          <a:ln/>
-        </p:spPr>
-        <p:txBody>
-          <a:bodyPr wrap="square" lIns="0" tIns="0" rIns="0" bIns="0" rtlCol="0" anchor="ctr"/>
-          <a:lstStyle/>
-          <a:p>
-            <a:pPr indent="0" marL="0">
-              <a:buNone/>
-            </a:pPr>
-            <a:r>
-              <a:rPr lang="en-US" sz="1300" b="1" dirty="0">
-                <a:solidFill>
-                  <a:srgbClr val="DC2626"/>
-                </a:solidFill>
-                <a:latin typeface="Georgia" pitchFamily="34" charset="0"/>
-                <a:ea typeface="Georgia" pitchFamily="34" charset="-122"/>
-                <a:cs typeface="Georgia" pitchFamily="34" charset="-120"/>
-              </a:rPr>
-              <a:t>⟨−3, −7⟩</a:t>
-            </a:r>
-            <a:endParaRPr lang="en-US" sz="1300" dirty="0"/>
-          </a:p>
-        </p:txBody>
-      </p:sp>
-      <p:sp>
-        <p:nvSpPr>
-          <p:cNvPr id="13" name="Text 10"/>
-          <p:cNvSpPr/>
-          <p:nvPr/>
-        </p:nvSpPr>
-        <p:spPr>
-          <a:xfrm>
-            <a:off x="6583680" y="3017520"/>
-            <a:ext cx="548640" cy="228600"/>
-          </a:xfrm>
-          <a:prstGeom prst="rect">
-            <a:avLst/>
-          </a:prstGeom>
-          <a:noFill/>
-          <a:ln/>
-        </p:spPr>
-        <p:txBody>
-          <a:bodyPr wrap="square" lIns="0" tIns="0" rIns="0" bIns="0" rtlCol="0" anchor="ctr"/>
-          <a:lstStyle/>
-          <a:p>
-            <a:pPr indent="0" marL="0">
-              <a:buNone/>
-            </a:pPr>
-            <a:r>
-              <a:rPr lang="en-US" sz="1200" dirty="0">
-                <a:solidFill>
-                  <a:srgbClr val="64748B"/>
-                </a:solidFill>
-                <a:latin typeface="Calibri" pitchFamily="34" charset="0"/>
-                <a:ea typeface="Calibri" pitchFamily="34" charset="-122"/>
-                <a:cs typeface="Calibri" pitchFamily="34" charset="-120"/>
-              </a:rPr>
-              <a:t>Q III</a:t>
-            </a:r>
-            <a:endParaRPr lang="en-US" sz="1200" dirty="0"/>
-          </a:p>
-        </p:txBody>
-      </p:sp>
-      <p:sp>
-        <p:nvSpPr>
-          <p:cNvPr id="14" name="Text 11"/>
-          <p:cNvSpPr/>
-          <p:nvPr/>
-        </p:nvSpPr>
-        <p:spPr>
-          <a:xfrm>
-            <a:off x="5212080" y="3291840"/>
-            <a:ext cx="3200400" cy="274320"/>
-          </a:xfrm>
-          <a:prstGeom prst="rect">
-            <a:avLst/>
-          </a:prstGeom>
-          <a:noFill/>
-          <a:ln/>
-        </p:spPr>
-        <p:txBody>
-          <a:bodyPr wrap="square" lIns="0" tIns="0" rIns="0" bIns="0" rtlCol="0" anchor="ctr"/>
-          <a:lstStyle/>
-          <a:p>
-            <a:pPr indent="0" marL="0">
-              <a:buNone/>
-            </a:pPr>
-            <a:r>
-              <a:rPr lang="en-US" sz="1400" b="1" dirty="0">
-                <a:solidFill>
-                  <a:srgbClr val="DC2626"/>
-                </a:solidFill>
-                <a:latin typeface="Calibri" pitchFamily="34" charset="0"/>
-                <a:ea typeface="Calibri" pitchFamily="34" charset="-122"/>
-                <a:cs typeface="Calibri" pitchFamily="34" charset="-120"/>
-              </a:rPr>
-              <a:t>θ ≈ 246.8°</a:t>
-            </a:r>
-            <a:endParaRPr lang="en-US" sz="1400" dirty="0"/>
-          </a:p>
-        </p:txBody>
-      </p:sp>
-      <p:sp>
-        <p:nvSpPr>
-          <p:cNvPr id="15" name="Text 12"/>
-          <p:cNvSpPr/>
-          <p:nvPr/>
-        </p:nvSpPr>
-        <p:spPr>
-          <a:xfrm>
-            <a:off x="5212080" y="3794760"/>
-            <a:ext cx="1371600" cy="228600"/>
-          </a:xfrm>
-          <a:prstGeom prst="rect">
-            <a:avLst/>
-          </a:prstGeom>
-          <a:noFill/>
-          <a:ln/>
-        </p:spPr>
-        <p:txBody>
-          <a:bodyPr wrap="square" lIns="0" tIns="0" rIns="0" bIns="0" rtlCol="0" anchor="ctr"/>
-          <a:lstStyle/>
-          <a:p>
-            <a:pPr indent="0" marL="0">
-              <a:buNone/>
-            </a:pPr>
-            <a:r>
-              <a:rPr lang="en-US" sz="1300" b="1" dirty="0">
-                <a:solidFill>
-                  <a:srgbClr val="F97316"/>
-                </a:solidFill>
-                <a:latin typeface="Georgia" pitchFamily="34" charset="0"/>
-                <a:ea typeface="Georgia" pitchFamily="34" charset="-122"/>
-                <a:cs typeface="Georgia" pitchFamily="34" charset="-120"/>
-              </a:rPr>
-              <a:t>⟨4, −2⟩</a:t>
-            </a:r>
-            <a:endParaRPr lang="en-US" sz="1300" dirty="0"/>
-          </a:p>
-        </p:txBody>
-      </p:sp>
-      <p:sp>
-        <p:nvSpPr>
-          <p:cNvPr id="16" name="Text 13"/>
-          <p:cNvSpPr/>
-          <p:nvPr/>
-        </p:nvSpPr>
-        <p:spPr>
-          <a:xfrm>
-            <a:off x="6583680" y="3794760"/>
-            <a:ext cx="548640" cy="228600"/>
-          </a:xfrm>
-          <a:prstGeom prst="rect">
-            <a:avLst/>
-          </a:prstGeom>
-          <a:noFill/>
-          <a:ln/>
-        </p:spPr>
-        <p:txBody>
-          <a:bodyPr wrap="square" lIns="0" tIns="0" rIns="0" bIns="0" rtlCol="0" anchor="ctr"/>
-          <a:lstStyle/>
-          <a:p>
-            <a:pPr indent="0" marL="0">
-              <a:buNone/>
-            </a:pPr>
-            <a:r>
-              <a:rPr lang="en-US" sz="1200" dirty="0">
-                <a:solidFill>
-                  <a:srgbClr val="64748B"/>
-                </a:solidFill>
-                <a:latin typeface="Calibri" pitchFamily="34" charset="0"/>
-                <a:ea typeface="Calibri" pitchFamily="34" charset="-122"/>
-                <a:cs typeface="Calibri" pitchFamily="34" charset="-120"/>
-              </a:rPr>
-              <a:t>Q IV</a:t>
-            </a:r>
-            <a:endParaRPr lang="en-US" sz="1200" dirty="0"/>
-          </a:p>
-        </p:txBody>
-      </p:sp>
-      <p:sp>
-        <p:nvSpPr>
-          <p:cNvPr id="17" name="Text 14"/>
-          <p:cNvSpPr/>
-          <p:nvPr/>
-        </p:nvSpPr>
-        <p:spPr>
-          <a:xfrm>
-            <a:off x="5212080" y="4069080"/>
-            <a:ext cx="3200400" cy="274320"/>
-          </a:xfrm>
-          <a:prstGeom prst="rect">
-            <a:avLst/>
-          </a:prstGeom>
-          <a:noFill/>
-          <a:ln/>
-        </p:spPr>
-        <p:txBody>
-          <a:bodyPr wrap="square" lIns="0" tIns="0" rIns="0" bIns="0" rtlCol="0" anchor="ctr"/>
-          <a:lstStyle/>
-          <a:p>
-            <a:pPr indent="0" marL="0">
-              <a:buNone/>
-            </a:pPr>
-            <a:r>
-              <a:rPr lang="en-US" sz="1400" b="1" dirty="0">
-                <a:solidFill>
-                  <a:srgbClr val="F97316"/>
-                </a:solidFill>
-                <a:latin typeface="Calibri" pitchFamily="34" charset="0"/>
-                <a:ea typeface="Calibri" pitchFamily="34" charset="-122"/>
-                <a:cs typeface="Calibri" pitchFamily="34" charset="-120"/>
-              </a:rPr>
-              <a:t>θ ≈ 333.4°</a:t>
-            </a:r>
-            <a:endParaRPr lang="en-US" sz="1400" dirty="0"/>
           </a:p>
         </p:txBody>
       </p:sp>
@@ -7912,6 +7442,139 @@
           </a:prstGeom>
         </p:spPr>
       </p:pic>
+      <p:sp>
+        <p:nvSpPr>
+          <p:cNvPr id="19" name="TextBox 18"/>
+          <p:cNvSpPr txBox="1"/>
+          <p:nvPr/>
+        </p:nvSpPr>
+        <p:spPr>
+          <a:xfrm>
+            <a:off x="5212080" y="1463040"/>
+            <a:ext cx="3657600" cy="2925000"/>
+          </a:xfrm>
+          <a:prstGeom prst="rect">
+            <a:avLst/>
+          </a:prstGeom>
+          <a:noFill/>
+        </p:spPr>
+        <p:txBody>
+          <a:bodyPr wrap="square">
+            <a:spAutoFit/>
+          </a:bodyPr>
+          <a:lstStyle/>
+          <a:p>
+            <a:r>
+              <a:rPr sz="1600" b="0">
+                <a:solidFill>
+                  <a:srgbClr val="1E3A5F"/>
+                </a:solidFill>
+                <a:latin typeface="Calibri"/>
+              </a:rPr>
+              <a:t>Compute α = tan⁻¹(b/a), then:</a:t>
+            </a:r>
+          </a:p>
+          <a:p>
+            <a:r>
+              <a:rPr sz="1000" b="0">
+                <a:solidFill>
+                  <a:srgbClr val="1E3A5F"/>
+                </a:solidFill>
+                <a:latin typeface="Calibri"/>
+              </a:rPr>
+              <a:t> </a:t>
+            </a:r>
+          </a:p>
+          <a:p>
+            <a:r>
+              <a:rPr sz="1600" b="1">
+                <a:solidFill>
+                  <a:srgbClr val="7C3AED"/>
+                </a:solidFill>
+                <a:latin typeface="Calibri"/>
+              </a:rPr>
+              <a:t>if a &lt; 0  →  θ = α + 180°</a:t>
+            </a:r>
+          </a:p>
+          <a:p>
+            <a:r>
+              <a:rPr sz="1300" b="0">
+                <a:solidFill>
+                  <a:srgbClr val="64748B"/>
+                </a:solidFill>
+                <a:latin typeface="Calibri"/>
+              </a:rPr>
+              <a:t>     (Q II or Q III)</a:t>
+            </a:r>
+          </a:p>
+          <a:p>
+            <a:r>
+              <a:rPr sz="1000" b="0">
+                <a:solidFill>
+                  <a:srgbClr val="1E3A5F"/>
+                </a:solidFill>
+                <a:latin typeface="Calibri"/>
+              </a:rPr>
+              <a:t> </a:t>
+            </a:r>
+          </a:p>
+          <a:p>
+            <a:r>
+              <a:rPr sz="1600" b="1">
+                <a:solidFill>
+                  <a:srgbClr val="7C3AED"/>
+                </a:solidFill>
+                <a:latin typeface="Calibri"/>
+              </a:rPr>
+              <a:t>else if b &lt; 0  →  θ = α + 360°</a:t>
+            </a:r>
+          </a:p>
+          <a:p>
+            <a:r>
+              <a:rPr sz="1300" b="0">
+                <a:solidFill>
+                  <a:srgbClr val="64748B"/>
+                </a:solidFill>
+                <a:latin typeface="Calibri"/>
+              </a:rPr>
+              <a:t>     (Q IV)</a:t>
+            </a:r>
+          </a:p>
+          <a:p>
+            <a:r>
+              <a:rPr sz="1000" b="0">
+                <a:solidFill>
+                  <a:srgbClr val="1E3A5F"/>
+                </a:solidFill>
+                <a:latin typeface="Calibri"/>
+              </a:rPr>
+              <a:t> </a:t>
+            </a:r>
+          </a:p>
+          <a:p>
+            <a:r>
+              <a:rPr sz="1600" b="1">
+                <a:solidFill>
+                  <a:srgbClr val="7C3AED"/>
+                </a:solidFill>
+                <a:latin typeface="Calibri"/>
+              </a:rPr>
+              <a:t>otherwise  →  θ = α</a:t>
+            </a:r>
+          </a:p>
+          <a:p>
+            <a:r>
+              <a:rPr sz="1300" b="0">
+                <a:solidFill>
+                  <a:srgbClr val="64748B"/>
+                </a:solidFill>
+                <a:latin typeface="Calibri"/>
+              </a:rPr>
+              <a:t>     (Q I)</a:t>
+            </a:r>
+          </a:p>
+        </p:txBody>
+      </p:sp>
     </p:spTree>
   </p:cSld>
   <p:clrMapOvr>
